--- a/极印版 aiken/销量概率分布模型介绍.pptx
+++ b/极印版 aiken/销量概率分布模型介绍.pptx
@@ -10959,7 +10959,7 @@
           <a:p>
             <a:fld id="{4E0D2018-1B90-4F6A-A637-180639EB00A6}" type="datetimeFigureOut">
               <a:rPr lang="zh-CN" altLang="en-US" smtClean="0"/>
-              <a:t>2026/10/28</a:t>
+              <a:t>2026/10/29</a:t>
             </a:fld>
             <a:endParaRPr lang="zh-CN" altLang="en-US"/>
           </a:p>
@@ -11674,7 +11674,7 @@
           <a:p>
             <a:fld id="{3C8F0D76-B11D-4625-AABB-57004887DA20}" type="datetimeFigureOut">
               <a:rPr lang="zh-CN" altLang="en-US" smtClean="0"/>
-              <a:t>2026/10/28</a:t>
+              <a:t>2026/10/29</a:t>
             </a:fld>
             <a:endParaRPr lang="zh-CN" altLang="en-US"/>
           </a:p>
@@ -14397,7 +14397,7 @@
                 <a:ea typeface="微软雅黑 Light" panose="020B0502040204020203" charset="-122"/>
                 <a:cs typeface="+mn-cs"/>
               </a:rPr>
-              <a:t>10/28/2026</a:t>
+              <a:t>10/29/2026</a:t>
             </a:fld>
             <a:endParaRPr kumimoji="0" lang="zh-CN" altLang="en-US" sz="1200" b="0" i="0" u="none" strike="noStrike" kern="1200" cap="none" spc="0" normalizeH="0" baseline="0" noProof="0" dirty="0">
               <a:ln>
@@ -15406,14 +15406,14 @@
             </p:custDataLst>
             <p:extLst>
               <p:ext uri="{D42A27DB-BD31-4B8C-83A1-F6EECF244321}">
-                <p14:modId xmlns:p14="http://schemas.microsoft.com/office/powerpoint/2010/main" val="3899571421"/>
+                <p14:modId xmlns:p14="http://schemas.microsoft.com/office/powerpoint/2010/main" val="3796693418"/>
               </p:ext>
             </p:extLst>
           </p:nvPr>
         </p:nvGraphicFramePr>
         <p:xfrm>
           <a:off x="838200" y="1444989"/>
-          <a:ext cx="10409555" cy="2529840"/>
+          <a:ext cx="10409551" cy="2108200"/>
         </p:xfrm>
         <a:graphic>
           <a:graphicData uri="http://schemas.openxmlformats.org/drawingml/2006/table">
@@ -15422,31 +15422,52 @@
                 <a:tableStyleId>{21E4AEA4-8DFA-4A89-87EB-49C32662AFE0}</a:tableStyleId>
               </a:tblPr>
               <a:tblGrid>
-                <a:gridCol w="1803237">
+                <a:gridCol w="1435873">
                   <a:extLst>
                     <a:ext uri="{9D8B030D-6E8A-4147-A177-3AD203B41FA5}">
                       <a16:colId xmlns:a16="http://schemas.microsoft.com/office/drawing/2014/main" val="20000"/>
                     </a:ext>
                   </a:extLst>
                 </a:gridCol>
-                <a:gridCol w="2869080">
+                <a:gridCol w="1495613">
                   <a:extLst>
                     <a:ext uri="{9D8B030D-6E8A-4147-A177-3AD203B41FA5}">
                       <a16:colId xmlns:a16="http://schemas.microsoft.com/office/drawing/2014/main" val="20001"/>
                     </a:ext>
                   </a:extLst>
                 </a:gridCol>
-                <a:gridCol w="2868619">
+                <a:gridCol w="1495613">
                   <a:extLst>
                     <a:ext uri="{9D8B030D-6E8A-4147-A177-3AD203B41FA5}">
                       <a16:colId xmlns:a16="http://schemas.microsoft.com/office/drawing/2014/main" val="20002"/>
                     </a:ext>
                   </a:extLst>
                 </a:gridCol>
-                <a:gridCol w="2868619">
+                <a:gridCol w="1495613">
                   <a:extLst>
                     <a:ext uri="{9D8B030D-6E8A-4147-A177-3AD203B41FA5}">
                       <a16:colId xmlns:a16="http://schemas.microsoft.com/office/drawing/2014/main" val="20003"/>
+                    </a:ext>
+                  </a:extLst>
+                </a:gridCol>
+                <a:gridCol w="1495613">
+                  <a:extLst>
+                    <a:ext uri="{9D8B030D-6E8A-4147-A177-3AD203B41FA5}">
+                      <a16:colId xmlns:a16="http://schemas.microsoft.com/office/drawing/2014/main" val="1129060881"/>
+                    </a:ext>
+                  </a:extLst>
+                </a:gridCol>
+                <a:gridCol w="1495613">
+                  <a:extLst>
+                    <a:ext uri="{9D8B030D-6E8A-4147-A177-3AD203B41FA5}">
+                      <a16:colId xmlns:a16="http://schemas.microsoft.com/office/drawing/2014/main" val="56429789"/>
+                    </a:ext>
+                  </a:extLst>
+                </a:gridCol>
+                <a:gridCol w="1495613">
+                  <a:extLst>
+                    <a:ext uri="{9D8B030D-6E8A-4147-A177-3AD203B41FA5}">
+                      <a16:colId xmlns:a16="http://schemas.microsoft.com/office/drawing/2014/main" val="2098068555"/>
                     </a:ext>
                   </a:extLst>
                 </a:gridCol>
@@ -15592,6 +15613,120 @@
                         </a:solidFill>
                         <a:latin typeface="+mn-ea"/>
                       </a:endParaRPr>
+                    </a:p>
+                  </a:txBody>
+                  <a:tcPr>
+                    <a:solidFill>
+                      <a:schemeClr val="accent1"/>
+                    </a:solidFill>
+                  </a:tcPr>
+                </a:tc>
+                <a:tc>
+                  <a:txBody>
+                    <a:bodyPr/>
+                    <a:lstStyle/>
+                    <a:p>
+                      <a:pPr algn="ctr">
+                        <a:lnSpc>
+                          <a:spcPct val="150000"/>
+                        </a:lnSpc>
+                        <a:buNone/>
+                        <a:defRPr sz="1200" b="1">
+                          <a:solidFill>
+                            <a:srgbClr val="14141E"/>
+                          </a:solidFill>
+                          <a:latin typeface="微软雅黑" panose="020B0503020204020204" charset="-122"/>
+                        </a:defRPr>
+                      </a:pPr>
+                      <a:r>
+                        <a:rPr lang="en-US" altLang="zh-CN" sz="1400" dirty="0">
+                          <a:solidFill>
+                            <a:schemeClr val="bg1"/>
+                          </a:solidFill>
+                          <a:latin typeface="+mn-ea"/>
+                        </a:rPr>
+                        <a:t>…</a:t>
+                      </a:r>
+                      <a:endParaRPr lang="zh-CN" altLang="en-US" sz="1400" dirty="0">
+                        <a:solidFill>
+                          <a:schemeClr val="bg1"/>
+                        </a:solidFill>
+                        <a:latin typeface="+mn-ea"/>
+                      </a:endParaRPr>
+                    </a:p>
+                  </a:txBody>
+                  <a:tcPr>
+                    <a:solidFill>
+                      <a:schemeClr val="accent1"/>
+                    </a:solidFill>
+                  </a:tcPr>
+                </a:tc>
+                <a:tc>
+                  <a:txBody>
+                    <a:bodyPr/>
+                    <a:lstStyle/>
+                    <a:p>
+                      <a:pPr algn="ctr">
+                        <a:lnSpc>
+                          <a:spcPct val="150000"/>
+                        </a:lnSpc>
+                        <a:buNone/>
+                        <a:defRPr sz="1200" b="1">
+                          <a:solidFill>
+                            <a:srgbClr val="14141E"/>
+                          </a:solidFill>
+                          <a:latin typeface="微软雅黑" panose="020B0503020204020204" charset="-122"/>
+                        </a:defRPr>
+                      </a:pPr>
+                      <a:r>
+                        <a:rPr lang="en-US" altLang="zh-CN" sz="1400" dirty="0">
+                          <a:solidFill>
+                            <a:schemeClr val="bg1"/>
+                          </a:solidFill>
+                          <a:latin typeface="+mn-ea"/>
+                        </a:rPr>
+                        <a:t>…</a:t>
+                      </a:r>
+                      <a:endParaRPr lang="zh-CN" altLang="en-US" sz="1400" dirty="0">
+                        <a:solidFill>
+                          <a:schemeClr val="bg1"/>
+                        </a:solidFill>
+                        <a:latin typeface="+mn-ea"/>
+                      </a:endParaRPr>
+                    </a:p>
+                  </a:txBody>
+                  <a:tcPr>
+                    <a:solidFill>
+                      <a:schemeClr val="accent1"/>
+                    </a:solidFill>
+                  </a:tcPr>
+                </a:tc>
+                <a:tc>
+                  <a:txBody>
+                    <a:bodyPr/>
+                    <a:lstStyle/>
+                    <a:p>
+                      <a:pPr algn="ctr">
+                        <a:lnSpc>
+                          <a:spcPct val="150000"/>
+                        </a:lnSpc>
+                        <a:buNone/>
+                        <a:defRPr sz="1200" b="1">
+                          <a:solidFill>
+                            <a:srgbClr val="14141E"/>
+                          </a:solidFill>
+                          <a:latin typeface="微软雅黑" panose="020B0503020204020204" charset="-122"/>
+                        </a:defRPr>
+                      </a:pPr>
+                      <a:r>
+                        <a:rPr lang="zh-CN" altLang="en-US" sz="1400" dirty="0">
+                          <a:solidFill>
+                            <a:schemeClr val="bg1"/>
+                          </a:solidFill>
+                          <a:latin typeface="+mn-ea"/>
+                        </a:rPr>
+                        <a:t>认知之外</a:t>
+                      </a:r>
                     </a:p>
                   </a:txBody>
                   <a:tcPr>
@@ -15751,6 +15886,117 @@
                   </a:txBody>
                   <a:tcPr anchor="ctr"/>
                 </a:tc>
+                <a:tc>
+                  <a:txBody>
+                    <a:bodyPr/>
+                    <a:lstStyle/>
+                    <a:p>
+                      <a:pPr marL="0" marR="0" lvl="0" indent="0" algn="ctr" defTabSz="914400" rtl="0" eaLnBrk="1" fontAlgn="auto" latinLnBrk="0" hangingPunct="1">
+                        <a:lnSpc>
+                          <a:spcPct val="150000"/>
+                        </a:lnSpc>
+                        <a:spcBef>
+                          <a:spcPts val="0"/>
+                        </a:spcBef>
+                        <a:spcAft>
+                          <a:spcPts val="0"/>
+                        </a:spcAft>
+                        <a:buClrTx/>
+                        <a:buSzTx/>
+                        <a:buFontTx/>
+                        <a:buNone/>
+                        <a:tabLst/>
+                        <a:defRPr sz="1200">
+                          <a:solidFill>
+                            <a:srgbClr val="CCCCCC"/>
+                          </a:solidFill>
+                          <a:latin typeface="微软雅黑" panose="020B0503020204020204" charset="-122"/>
+                        </a:defRPr>
+                      </a:pPr>
+                      <a:endParaRPr lang="en-US" altLang="zh-CN" sz="1400" dirty="0">
+                        <a:solidFill>
+                          <a:schemeClr val="tx1"/>
+                        </a:solidFill>
+                        <a:latin typeface="+mn-ea"/>
+                      </a:endParaRPr>
+                    </a:p>
+                  </a:txBody>
+                  <a:tcPr anchor="ctr"/>
+                </a:tc>
+                <a:tc>
+                  <a:txBody>
+                    <a:bodyPr/>
+                    <a:lstStyle/>
+                    <a:p>
+                      <a:pPr marL="0" marR="0" lvl="0" indent="0" algn="ctr" defTabSz="914400" rtl="0" eaLnBrk="1" fontAlgn="auto" latinLnBrk="0" hangingPunct="1">
+                        <a:lnSpc>
+                          <a:spcPct val="150000"/>
+                        </a:lnSpc>
+                        <a:spcBef>
+                          <a:spcPts val="0"/>
+                        </a:spcBef>
+                        <a:spcAft>
+                          <a:spcPts val="0"/>
+                        </a:spcAft>
+                        <a:buClrTx/>
+                        <a:buSzTx/>
+                        <a:buFontTx/>
+                        <a:buNone/>
+                        <a:tabLst/>
+                        <a:defRPr sz="1200">
+                          <a:solidFill>
+                            <a:srgbClr val="CCCCCC"/>
+                          </a:solidFill>
+                          <a:latin typeface="微软雅黑" panose="020B0503020204020204" charset="-122"/>
+                        </a:defRPr>
+                      </a:pPr>
+                      <a:endParaRPr lang="en-US" altLang="zh-CN" sz="1400" dirty="0">
+                        <a:solidFill>
+                          <a:schemeClr val="tx1"/>
+                        </a:solidFill>
+                        <a:latin typeface="+mn-ea"/>
+                      </a:endParaRPr>
+                    </a:p>
+                  </a:txBody>
+                  <a:tcPr anchor="ctr"/>
+                </a:tc>
+                <a:tc>
+                  <a:txBody>
+                    <a:bodyPr/>
+                    <a:lstStyle/>
+                    <a:p>
+                      <a:pPr marL="0" marR="0" lvl="0" indent="0" algn="ctr" defTabSz="914400" rtl="0" eaLnBrk="1" fontAlgn="auto" latinLnBrk="0" hangingPunct="1">
+                        <a:lnSpc>
+                          <a:spcPct val="150000"/>
+                        </a:lnSpc>
+                        <a:spcBef>
+                          <a:spcPts val="0"/>
+                        </a:spcBef>
+                        <a:spcAft>
+                          <a:spcPts val="0"/>
+                        </a:spcAft>
+                        <a:buClrTx/>
+                        <a:buSzTx/>
+                        <a:buFontTx/>
+                        <a:buNone/>
+                        <a:tabLst/>
+                        <a:defRPr sz="1200">
+                          <a:solidFill>
+                            <a:srgbClr val="CCCCCC"/>
+                          </a:solidFill>
+                          <a:latin typeface="微软雅黑" panose="020B0503020204020204" charset="-122"/>
+                        </a:defRPr>
+                      </a:pPr>
+                      <a:endParaRPr lang="en-US" altLang="zh-CN" sz="1400" dirty="0">
+                        <a:solidFill>
+                          <a:schemeClr val="tx1"/>
+                        </a:solidFill>
+                        <a:latin typeface="+mn-ea"/>
+                      </a:endParaRPr>
+                    </a:p>
+                  </a:txBody>
+                  <a:tcPr anchor="ctr"/>
+                </a:tc>
                 <a:extLst>
                   <a:ext uri="{0D108BD9-81ED-4DB2-BD59-A6C34878D82A}">
                     <a16:rowId xmlns:a16="http://schemas.microsoft.com/office/drawing/2014/main" val="10001"/>
@@ -15904,6 +16150,87 @@
                   </a:txBody>
                   <a:tcPr anchor="ctr"/>
                 </a:tc>
+                <a:tc>
+                  <a:txBody>
+                    <a:bodyPr/>
+                    <a:lstStyle/>
+                    <a:p>
+                      <a:pPr algn="ctr">
+                        <a:lnSpc>
+                          <a:spcPct val="150000"/>
+                        </a:lnSpc>
+                        <a:buNone/>
+                        <a:defRPr sz="1200">
+                          <a:solidFill>
+                            <a:srgbClr val="CCCCCC"/>
+                          </a:solidFill>
+                          <a:latin typeface="微软雅黑" panose="020B0503020204020204" charset="-122"/>
+                        </a:defRPr>
+                      </a:pPr>
+                      <a:endParaRPr lang="zh-CN" altLang="en-US" sz="1400" dirty="0">
+                        <a:solidFill>
+                          <a:schemeClr val="tx1"/>
+                        </a:solidFill>
+                        <a:latin typeface="+mn-ea"/>
+                      </a:endParaRPr>
+                    </a:p>
+                  </a:txBody>
+                  <a:tcPr anchor="ctr"/>
+                </a:tc>
+                <a:tc>
+                  <a:txBody>
+                    <a:bodyPr/>
+                    <a:lstStyle/>
+                    <a:p>
+                      <a:pPr algn="ctr">
+                        <a:lnSpc>
+                          <a:spcPct val="150000"/>
+                        </a:lnSpc>
+                        <a:buNone/>
+                        <a:defRPr sz="1200">
+                          <a:solidFill>
+                            <a:srgbClr val="CCCCCC"/>
+                          </a:solidFill>
+                          <a:latin typeface="微软雅黑" panose="020B0503020204020204" charset="-122"/>
+                        </a:defRPr>
+                      </a:pPr>
+                      <a:endParaRPr lang="zh-CN" altLang="en-US" sz="1400" dirty="0">
+                        <a:solidFill>
+                          <a:schemeClr val="tx1"/>
+                        </a:solidFill>
+                        <a:latin typeface="+mn-ea"/>
+                      </a:endParaRPr>
+                    </a:p>
+                  </a:txBody>
+                  <a:tcPr anchor="ctr"/>
+                </a:tc>
+                <a:tc>
+                  <a:txBody>
+                    <a:bodyPr/>
+                    <a:lstStyle/>
+                    <a:p>
+                      <a:pPr algn="ctr">
+                        <a:lnSpc>
+                          <a:spcPct val="150000"/>
+                        </a:lnSpc>
+                        <a:buNone/>
+                        <a:defRPr sz="1200">
+                          <a:solidFill>
+                            <a:srgbClr val="CCCCCC"/>
+                          </a:solidFill>
+                          <a:latin typeface="微软雅黑" panose="020B0503020204020204" charset="-122"/>
+                        </a:defRPr>
+                      </a:pPr>
+                      <a:endParaRPr lang="zh-CN" altLang="en-US" sz="1400" dirty="0">
+                        <a:solidFill>
+                          <a:schemeClr val="tx1"/>
+                        </a:solidFill>
+                        <a:latin typeface="+mn-ea"/>
+                      </a:endParaRPr>
+                    </a:p>
+                  </a:txBody>
+                  <a:tcPr anchor="ctr"/>
+                </a:tc>
                 <a:extLst>
                   <a:ext uri="{0D108BD9-81ED-4DB2-BD59-A6C34878D82A}">
                     <a16:rowId xmlns:a16="http://schemas.microsoft.com/office/drawing/2014/main" val="10002"/>
@@ -15988,6 +16315,87 @@
                     </a:p>
                   </a:txBody>
                   <a:tcPr/>
+                </a:tc>
+                <a:tc>
+                  <a:txBody>
+                    <a:bodyPr/>
+                    <a:lstStyle/>
+                    <a:p>
+                      <a:pPr algn="ctr">
+                        <a:lnSpc>
+                          <a:spcPct val="150000"/>
+                        </a:lnSpc>
+                        <a:buNone/>
+                        <a:defRPr sz="1200">
+                          <a:solidFill>
+                            <a:srgbClr val="CCCCCC"/>
+                          </a:solidFill>
+                          <a:latin typeface="微软雅黑" panose="020B0503020204020204" charset="-122"/>
+                        </a:defRPr>
+                      </a:pPr>
+                      <a:endParaRPr lang="zh-CN" altLang="en-US" sz="1400" dirty="0">
+                        <a:solidFill>
+                          <a:schemeClr val="tx1"/>
+                        </a:solidFill>
+                        <a:latin typeface="+mn-ea"/>
+                      </a:endParaRPr>
+                    </a:p>
+                  </a:txBody>
+                  <a:tcPr anchor="ctr"/>
+                </a:tc>
+                <a:tc>
+                  <a:txBody>
+                    <a:bodyPr/>
+                    <a:lstStyle/>
+                    <a:p>
+                      <a:pPr algn="ctr">
+                        <a:lnSpc>
+                          <a:spcPct val="150000"/>
+                        </a:lnSpc>
+                        <a:buNone/>
+                        <a:defRPr sz="1200">
+                          <a:solidFill>
+                            <a:srgbClr val="CCCCCC"/>
+                          </a:solidFill>
+                          <a:latin typeface="微软雅黑" panose="020B0503020204020204" charset="-122"/>
+                        </a:defRPr>
+                      </a:pPr>
+                      <a:endParaRPr lang="zh-CN" altLang="en-US" sz="1400" dirty="0">
+                        <a:solidFill>
+                          <a:schemeClr val="tx1"/>
+                        </a:solidFill>
+                        <a:latin typeface="+mn-ea"/>
+                      </a:endParaRPr>
+                    </a:p>
+                  </a:txBody>
+                  <a:tcPr anchor="ctr"/>
+                </a:tc>
+                <a:tc>
+                  <a:txBody>
+                    <a:bodyPr/>
+                    <a:lstStyle/>
+                    <a:p>
+                      <a:pPr algn="ctr">
+                        <a:lnSpc>
+                          <a:spcPct val="150000"/>
+                        </a:lnSpc>
+                        <a:buNone/>
+                        <a:defRPr sz="1200">
+                          <a:solidFill>
+                            <a:srgbClr val="CCCCCC"/>
+                          </a:solidFill>
+                          <a:latin typeface="微软雅黑" panose="020B0503020204020204" charset="-122"/>
+                        </a:defRPr>
+                      </a:pPr>
+                      <a:endParaRPr lang="zh-CN" altLang="en-US" sz="1400" dirty="0">
+                        <a:solidFill>
+                          <a:schemeClr val="tx1"/>
+                        </a:solidFill>
+                        <a:latin typeface="+mn-ea"/>
+                      </a:endParaRPr>
+                    </a:p>
+                  </a:txBody>
+                  <a:tcPr anchor="ctr"/>
                 </a:tc>
                 <a:tc>
                   <a:txBody>
@@ -16137,13 +16545,6 @@
                   </a:txBody>
                   <a:tcPr anchor="ctr"/>
                 </a:tc>
-                <a:extLst>
-                  <a:ext uri="{0D108BD9-81ED-4DB2-BD59-A6C34878D82A}">
-                    <a16:rowId xmlns:a16="http://schemas.microsoft.com/office/drawing/2014/main" val="10004"/>
-                  </a:ext>
-                </a:extLst>
-              </a:tr>
-              <a:tr h="421640">
                 <a:tc>
                   <a:txBody>
                     <a:bodyPr/>
@@ -16153,6 +16554,7 @@
                         <a:lnSpc>
                           <a:spcPct val="150000"/>
                         </a:lnSpc>
+                        <a:buNone/>
                         <a:defRPr sz="1200">
                           <a:solidFill>
                             <a:srgbClr val="CCCCCC"/>
@@ -16160,16 +16562,7 @@
                           <a:latin typeface="微软雅黑" panose="020B0503020204020204" charset="-122"/>
                         </a:defRPr>
                       </a:pPr>
-                      <a:r>
-                        <a:rPr lang="zh-CN" altLang="en-US" sz="1400" dirty="0">
-                          <a:solidFill>
-                            <a:schemeClr val="tx1"/>
-                          </a:solidFill>
-                          <a:latin typeface="+mn-ea"/>
-                        </a:rPr>
-                        <a:t>三年实际</a:t>
-                      </a:r>
-                      <a:endParaRPr sz="1400" dirty="0">
+                      <a:endParaRPr lang="zh-CN" altLang="en-US" sz="1400" dirty="0">
                         <a:solidFill>
                           <a:schemeClr val="tx1"/>
                         </a:solidFill>
@@ -16177,59 +16570,7 @@
                       </a:endParaRPr>
                     </a:p>
                   </a:txBody>
-                  <a:tcPr/>
-                </a:tc>
-                <a:tc>
-                  <a:txBody>
-                    <a:bodyPr/>
-                    <a:lstStyle/>
-                    <a:p>
-                      <a:pPr algn="ctr">
-                        <a:lnSpc>
-                          <a:spcPct val="150000"/>
-                        </a:lnSpc>
-                        <a:defRPr sz="1200">
-                          <a:solidFill>
-                            <a:srgbClr val="CCCCCC"/>
-                          </a:solidFill>
-                          <a:latin typeface="微软雅黑" panose="020B0503020204020204" charset="-122"/>
-                        </a:defRPr>
-                      </a:pPr>
-                      <a:endParaRPr sz="1400">
-                        <a:solidFill>
-                          <a:schemeClr val="tx1"/>
-                        </a:solidFill>
-                        <a:latin typeface="+mn-ea"/>
-                      </a:endParaRPr>
-                    </a:p>
-                  </a:txBody>
-                  <a:tcPr/>
-                </a:tc>
-                <a:tc>
-                  <a:txBody>
-                    <a:bodyPr/>
-                    <a:lstStyle/>
-                    <a:p>
-                      <a:pPr algn="ctr">
-                        <a:lnSpc>
-                          <a:spcPct val="150000"/>
-                        </a:lnSpc>
-                        <a:defRPr sz="1200">
-                          <a:solidFill>
-                            <a:srgbClr val="CCCCCC"/>
-                          </a:solidFill>
-                          <a:latin typeface="微软雅黑" panose="020B0503020204020204" charset="-122"/>
-                        </a:defRPr>
-                      </a:pPr>
-                      <a:endParaRPr sz="1400" dirty="0">
-                        <a:solidFill>
-                          <a:schemeClr val="tx1"/>
-                        </a:solidFill>
-                        <a:latin typeface="+mn-ea"/>
-                      </a:endParaRPr>
-                    </a:p>
-                  </a:txBody>
-                  <a:tcPr/>
+                  <a:tcPr anchor="ctr"/>
                 </a:tc>
                 <a:tc>
                   <a:txBody>
@@ -16258,9 +16599,55 @@
                   </a:txBody>
                   <a:tcPr anchor="ctr"/>
                 </a:tc>
+                <a:tc>
+                  <a:txBody>
+                    <a:bodyPr/>
+                    <a:lstStyle/>
+                    <a:p>
+                      <a:pPr marL="0" marR="0" lvl="0" indent="0" algn="ctr" defTabSz="914400" rtl="0" eaLnBrk="1" fontAlgn="auto" latinLnBrk="0" hangingPunct="1">
+                        <a:lnSpc>
+                          <a:spcPct val="150000"/>
+                        </a:lnSpc>
+                        <a:spcBef>
+                          <a:spcPts val="0"/>
+                        </a:spcBef>
+                        <a:spcAft>
+                          <a:spcPts val="0"/>
+                        </a:spcAft>
+                        <a:buClrTx/>
+                        <a:buSzTx/>
+                        <a:buFontTx/>
+                        <a:buNone/>
+                        <a:tabLst/>
+                        <a:defRPr sz="1200">
+                          <a:solidFill>
+                            <a:srgbClr val="CCCCCC"/>
+                          </a:solidFill>
+                          <a:latin typeface="微软雅黑" panose="020B0503020204020204" charset="-122"/>
+                        </a:defRPr>
+                      </a:pPr>
+                      <a:r>
+                        <a:rPr lang="en-US" altLang="zh-CN" sz="1400" b="1" dirty="0">
+                          <a:solidFill>
+                            <a:schemeClr val="tx1"/>
+                          </a:solidFill>
+                          <a:latin typeface="+mn-ea"/>
+                        </a:rPr>
+                        <a:t>418,717</a:t>
+                      </a:r>
+                      <a:endParaRPr lang="zh-CN" altLang="en-US" sz="1400" b="1" dirty="0">
+                        <a:solidFill>
+                          <a:schemeClr val="tx1"/>
+                        </a:solidFill>
+                        <a:latin typeface="+mn-ea"/>
+                      </a:endParaRPr>
+                    </a:p>
+                  </a:txBody>
+                  <a:tcPr anchor="ctr"/>
+                </a:tc>
                 <a:extLst>
                   <a:ext uri="{0D108BD9-81ED-4DB2-BD59-A6C34878D82A}">
-                    <a16:rowId xmlns:a16="http://schemas.microsoft.com/office/drawing/2014/main" val="10005"/>
+                    <a16:rowId xmlns:a16="http://schemas.microsoft.com/office/drawing/2014/main" val="10004"/>
                   </a:ext>
                 </a:extLst>
               </a:tr>
@@ -18076,8 +18463,8 @@
             <a:chExt cx="5760000" cy="2315603"/>
           </a:xfrm>
         </p:grpSpPr>
-        <mc:AlternateContent xmlns:mc="http://schemas.openxmlformats.org/markup-compatibility/2006">
-          <mc:Choice xmlns:cx1="http://schemas.microsoft.com/office/drawing/2015/9/8/chartex" Requires="cx1">
+        <mc:AlternateContent xmlns:mc="http://schemas.openxmlformats.org/markup-compatibility/2006" xmlns:cx1="http://schemas.microsoft.com/office/drawing/2015/9/8/chartex">
+          <mc:Choice Requires="cx1">
             <p:graphicFrame>
               <p:nvGraphicFramePr>
                 <p:cNvPr id="6" name="图表 5">
@@ -18101,7 +18488,7 @@
               </a:graphic>
             </p:graphicFrame>
           </mc:Choice>
-          <mc:Fallback>
+          <mc:Fallback xmlns="">
             <p:pic>
               <p:nvPicPr>
                 <p:cNvPr id="6" name="图表 5">
@@ -18832,7 +19219,7 @@
     </a:fmtScheme>
     <a:extLst>
       <a:ext uri="{D81B5157-A7B6-4480-A006-42BB1BC3E7BB}">
-        <wpsdc:hlinkScheme xmlns="" xmlns:wpsdc="http://www.wps.cn/officeDocument/2017/drawingmlCustomData" underline="false"/>
+        <wpsdc:hlinkScheme xmlns:wpsdc="http://www.wps.cn/officeDocument/2017/drawingmlCustomData" xmlns="" underline="false"/>
       </a:ext>
     </a:extLst>
   </a:themeElements>
